--- a/docs/assets/downloads/ai-grounding.pptx
+++ b/docs/assets/downloads/ai-grounding.pptx
@@ -3191,7 +3191,7 @@
       </p:grpSpPr>
       <p:pic>
         <p:nvPicPr>
-          <p:cNvPr id="2" name="Image 0" descr="/home/marco/fy27-hackathons/frontier-ai-starter-kit-rvas/docs/assets/img/logo-mark-white-slide.png">    </p:cNvPr>
+          <p:cNvPr id="2" name="Image 0" descr="/Users/marco/Desktop/repo/frontier-agentic-cobuild-rvas/docs/assets/img/logo-mark-white-slide.png">    </p:cNvPr>
           <p:cNvPicPr>
             <a:picLocks noChangeAspect="1"/>
           </p:cNvPicPr>
@@ -3410,42 +3410,7 @@
                 <a:ea typeface="Inter" pitchFamily="34" charset="-122"/>
                 <a:cs typeface="Inter" pitchFamily="34" charset="-120"/>
               </a:rPr>
-              <a:t>Use this deck to discuss sources, access, retrieval evidence, and proof before a pilot ships.</a:t>
-            </a:r>
-            <a:endParaRPr lang="en-US" sz="1700" dirty="0"/>
-          </a:p>
-          <a:p>
-            <a:pPr indent="0" marL="0">
-              <a:buNone/>
-            </a:pPr>
-            <a:r>
-              <a:rPr lang="en-US" sz="1700" dirty="0">
-                <a:solidFill>
-                  <a:srgbClr val="FFFFFF"/>
-                </a:solidFill>
-                <a:latin typeface="Inter" pitchFamily="34" charset="0"/>
-                <a:ea typeface="Inter" pitchFamily="34" charset="-122"/>
-                <a:cs typeface="Inter" pitchFamily="34" charset="-120"/>
-              </a:rPr>
-              <a:t>
-</a:t>
-            </a:r>
-            <a:endParaRPr lang="en-US" sz="1700" dirty="0"/>
-          </a:p>
-          <a:p>
-            <a:pPr indent="0" marL="0">
-              <a:buNone/>
-            </a:pPr>
-            <a:r>
-              <a:rPr lang="en-US" sz="1700" dirty="0">
-                <a:solidFill>
-                  <a:srgbClr val="FFFFFF"/>
-                </a:solidFill>
-                <a:latin typeface="Inter" pitchFamily="34" charset="0"/>
-                <a:ea typeface="Inter" pitchFamily="34" charset="-122"/>
-                <a:cs typeface="Inter" pitchFamily="34" charset="-120"/>
-              </a:rPr>
-              <a:t>Workshop outcome: choose a governed context pattern, access boundary, evaluation plan, and operating evidence for one bounded AI-assisted decision.</a:t>
+              <a:t>Choose approved sources and an access boundary for one AI-assisted customer decision. Agree on evaluation checks and operating evidence before releasing the pilot.</a:t>
             </a:r>
             <a:endParaRPr lang="en-US" sz="1700" dirty="0"/>
           </a:p>
@@ -3512,7 +3477,7 @@
       </p:sp>
       <p:pic>
         <p:nvPicPr>
-          <p:cNvPr id="3" name="Image 0" descr="/home/marco/fy27-hackathons/frontier-ai-starter-kit-rvas/docs/assets/img/logo-mark-slide.png">    </p:cNvPr>
+          <p:cNvPr id="3" name="Image 0" descr="/Users/marco/Desktop/repo/frontier-agentic-cobuild-rvas/docs/assets/img/logo-mark-slide.png">    </p:cNvPr>
           <p:cNvPicPr>
             <a:picLocks noChangeAspect="1"/>
           </p:cNvPicPr>
@@ -3649,7 +3614,7 @@
                 <a:ea typeface="Outfit" pitchFamily="34" charset="-122"/>
                 <a:cs typeface="Outfit" pitchFamily="34" charset="-120"/>
               </a:rPr>
-              <a:t>Module 3 choices: managed, custom, or remote knowledge</a:t>
+              <a:t>Module 3. Choose managed, custom, or remote knowledge</a:t>
             </a:r>
             <a:endParaRPr lang="en-US" sz="2900" dirty="0"/>
           </a:p>
@@ -5024,7 +4989,7 @@
       </p:sp>
       <p:pic>
         <p:nvPicPr>
-          <p:cNvPr id="3" name="Image 0" descr="/home/marco/fy27-hackathons/frontier-ai-starter-kit-rvas/docs/assets/img/logo-mark-slide.png">    </p:cNvPr>
+          <p:cNvPr id="3" name="Image 0" descr="/Users/marco/Desktop/repo/frontier-agentic-cobuild-rvas/docs/assets/img/logo-mark-slide.png">    </p:cNvPr>
           <p:cNvPicPr>
             <a:picLocks noChangeAspect="1"/>
           </p:cNvPicPr>
@@ -5153,7 +5118,7 @@
               <a:buNone/>
             </a:pPr>
             <a:r>
-              <a:rPr lang="en-US" sz="2500" b="1" dirty="0">
+              <a:rPr lang="en-US" sz="2900" b="1" dirty="0">
                 <a:solidFill>
                   <a:srgbClr val="032254"/>
                 </a:solidFill>
@@ -5161,9 +5126,9 @@
                 <a:ea typeface="Outfit" pitchFamily="34" charset="-122"/>
                 <a:cs typeface="Outfit" pitchFamily="34" charset="-120"/>
               </a:rPr>
-              <a:t>Module 3 — what must be true: approved documents are discoverable</a:t>
-            </a:r>
-            <a:endParaRPr lang="en-US" sz="2500" dirty="0"/>
+              <a:t>Module 3. Prove approved documents are discoverable</a:t>
+            </a:r>
+            <a:endParaRPr lang="en-US" sz="2900" dirty="0"/>
           </a:p>
         </p:txBody>
       </p:sp>
@@ -5345,7 +5310,7 @@
                 <a:ea typeface="Inter" pitchFamily="34" charset="-122"/>
                 <a:cs typeface="Inter" pitchFamily="34" charset="-120"/>
               </a:rPr>
-              <a:t>Decision: the knowledge layer produces trustworthy retrieval evidence before you judge answers.</a:t>
+              <a:t>Review retrieved passages before judging generated answers.</a:t>
             </a:r>
             <a:endParaRPr lang="en-US" sz="1700" dirty="0"/>
           </a:p>
@@ -5412,7 +5377,7 @@
       </p:sp>
       <p:pic>
         <p:nvPicPr>
-          <p:cNvPr id="3" name="Image 0" descr="/home/marco/fy27-hackathons/frontier-ai-starter-kit-rvas/docs/assets/img/logo-mark-slide.png">    </p:cNvPr>
+          <p:cNvPr id="3" name="Image 0" descr="/Users/marco/Desktop/repo/frontier-agentic-cobuild-rvas/docs/assets/img/logo-mark-slide.png">    </p:cNvPr>
           <p:cNvPicPr>
             <a:picLocks noChangeAspect="1"/>
           </p:cNvPicPr>
@@ -5549,7 +5514,7 @@
                 <a:ea typeface="Outfit" pitchFamily="34" charset="-122"/>
                 <a:cs typeface="Outfit" pitchFamily="34" charset="-120"/>
               </a:rPr>
-              <a:t>Module 4 context: compare chat and embedding choices</a:t>
+              <a:t>Module 4. Compare chat and embedding choices</a:t>
             </a:r>
             <a:endParaRPr lang="en-US" sz="2900" dirty="0"/>
           </a:p>
@@ -5679,7 +5644,7 @@
                 <a:ea typeface="Inter" pitchFamily="34" charset="-122"/>
                 <a:cs typeface="Inter" pitchFamily="34" charset="-120"/>
               </a:rPr>
-              <a:t>The embedding model: retrieval quality for the customer’s vocabulary, abbreviations, and document style</a:t>
+              <a:t>The embedding model: retrieval quality for the customer's vocabulary, abbreviations, and document style</a:t>
             </a:r>
             <a:endParaRPr lang="en-US" sz="1700" dirty="0"/>
           </a:p>
@@ -5732,7 +5697,7 @@
                 <a:ea typeface="Inter" pitchFamily="34" charset="-122"/>
                 <a:cs typeface="Inter" pitchFamily="34" charset="-120"/>
               </a:rPr>
-              <a:t>Principle: pick models using golden-dataset evidence, not reputation.</a:t>
+              <a:t>Pick models using results from the customer's golden dataset.</a:t>
             </a:r>
             <a:endParaRPr lang="en-US" sz="1700" dirty="0"/>
           </a:p>
@@ -5799,7 +5764,7 @@
       </p:sp>
       <p:pic>
         <p:nvPicPr>
-          <p:cNvPr id="3" name="Image 0" descr="/home/marco/fy27-hackathons/frontier-ai-starter-kit-rvas/docs/assets/img/logo-mark-slide.png">    </p:cNvPr>
+          <p:cNvPr id="3" name="Image 0" descr="/Users/marco/Desktop/repo/frontier-agentic-cobuild-rvas/docs/assets/img/logo-mark-slide.png">    </p:cNvPr>
           <p:cNvPicPr>
             <a:picLocks noChangeAspect="1"/>
           </p:cNvPicPr>
@@ -5936,7 +5901,7 @@
                 <a:ea typeface="Outfit" pitchFamily="34" charset="-122"/>
                 <a:cs typeface="Outfit" pitchFamily="34" charset="-120"/>
               </a:rPr>
-              <a:t>Module 4 choices: quality, latency, cost, and capacity</a:t>
+              <a:t>Module 4. Compare quality, latency, cost, and capacity</a:t>
             </a:r>
             <a:endParaRPr lang="en-US" sz="2900" dirty="0"/>
           </a:p>
@@ -5969,7 +5934,7 @@
               <a:buNone/>
             </a:pPr>
             <a:r>
-              <a:rPr lang="en-US" sz="1500" dirty="0">
+              <a:rPr lang="en-US" sz="1600" dirty="0">
                 <a:solidFill>
                   <a:srgbClr val="111827"/>
                 </a:solidFill>
@@ -5979,7 +5944,7 @@
               </a:rPr>
               <a:t>Access control and citations are baseline obligations, not trade-offs.</a:t>
             </a:r>
-            <a:endParaRPr lang="en-US" sz="1500" dirty="0"/>
+            <a:endParaRPr lang="en-US" sz="1600" dirty="0"/>
           </a:p>
         </p:txBody>
       </p:sp>
@@ -6019,7 +5984,7 @@
                         <a:buNone/>
                       </a:pPr>
                       <a:r>
-                        <a:rPr lang="en-US" sz="1300" dirty="0">
+                        <a:rPr lang="en-US" sz="1500" dirty="0">
                           <a:solidFill>
                             <a:srgbClr val="111827"/>
                           </a:solidFill>
@@ -6029,7 +5994,7 @@
                         </a:rPr>
                         <a:t>Decision</a:t>
                       </a:r>
-                      <a:endParaRPr lang="en-US" sz="1300" dirty="0">
+                      <a:endParaRPr lang="en-US" sz="1500" dirty="0">
                         <a:latin typeface="Inter" charset="0"/>
                         <a:ea typeface="Inter" charset="0"/>
                         <a:cs typeface="Inter" charset="0"/>
@@ -6087,7 +6052,7 @@
                         <a:buNone/>
                       </a:pPr>
                       <a:r>
-                        <a:rPr lang="en-US" sz="1300" dirty="0">
+                        <a:rPr lang="en-US" sz="1500" dirty="0">
                           <a:solidFill>
                             <a:srgbClr val="111827"/>
                           </a:solidFill>
@@ -6097,7 +6062,7 @@
                         </a:rPr>
                         <a:t>Customer trade-off</a:t>
                       </a:r>
-                      <a:endParaRPr lang="en-US" sz="1300" dirty="0">
+                      <a:endParaRPr lang="en-US" sz="1500" dirty="0">
                         <a:latin typeface="Inter" charset="0"/>
                         <a:ea typeface="Inter" charset="0"/>
                         <a:cs typeface="Inter" charset="0"/>
@@ -6157,7 +6122,7 @@
                         <a:buNone/>
                       </a:pPr>
                       <a:r>
-                        <a:rPr lang="en-US" sz="1300" dirty="0">
+                        <a:rPr lang="en-US" sz="1500" dirty="0">
                           <a:solidFill>
                             <a:srgbClr val="111827"/>
                           </a:solidFill>
@@ -6167,7 +6132,7 @@
                         </a:rPr>
                         <a:t>Larger chat model</a:t>
                       </a:r>
-                      <a:endParaRPr lang="en-US" sz="1300" dirty="0">
+                      <a:endParaRPr lang="en-US" sz="1500" dirty="0">
                         <a:latin typeface="Inter" charset="0"/>
                         <a:ea typeface="Inter" charset="0"/>
                         <a:cs typeface="Inter" charset="0"/>
@@ -6225,7 +6190,7 @@
                         <a:buNone/>
                       </a:pPr>
                       <a:r>
-                        <a:rPr lang="en-US" sz="1300" dirty="0">
+                        <a:rPr lang="en-US" sz="1500" dirty="0">
                           <a:solidFill>
                             <a:srgbClr val="111827"/>
                           </a:solidFill>
@@ -6235,7 +6200,7 @@
                         </a:rPr>
                         <a:t>May improve reasoning, but can increase latency and cost</a:t>
                       </a:r>
-                      <a:endParaRPr lang="en-US" sz="1300" dirty="0">
+                      <a:endParaRPr lang="en-US" sz="1500" dirty="0">
                         <a:latin typeface="Inter" charset="0"/>
                         <a:ea typeface="Inter" charset="0"/>
                         <a:cs typeface="Inter" charset="0"/>
@@ -6295,7 +6260,7 @@
                         <a:buNone/>
                       </a:pPr>
                       <a:r>
-                        <a:rPr lang="en-US" sz="1300" dirty="0">
+                        <a:rPr lang="en-US" sz="1500" dirty="0">
                           <a:solidFill>
                             <a:srgbClr val="111827"/>
                           </a:solidFill>
@@ -6305,7 +6270,7 @@
                         </a:rPr>
                         <a:t>Smaller chat model</a:t>
                       </a:r>
-                      <a:endParaRPr lang="en-US" sz="1300" dirty="0">
+                      <a:endParaRPr lang="en-US" sz="1500" dirty="0">
                         <a:latin typeface="Inter" charset="0"/>
                         <a:ea typeface="Inter" charset="0"/>
                         <a:cs typeface="Inter" charset="0"/>
@@ -6363,7 +6328,7 @@
                         <a:buNone/>
                       </a:pPr>
                       <a:r>
-                        <a:rPr lang="en-US" sz="1300" dirty="0">
+                        <a:rPr lang="en-US" sz="1500" dirty="0">
                           <a:solidFill>
                             <a:srgbClr val="111827"/>
                           </a:solidFill>
@@ -6373,7 +6338,7 @@
                         </a:rPr>
                         <a:t>May be faster and cheaper, but needs proof on hard cases</a:t>
                       </a:r>
-                      <a:endParaRPr lang="en-US" sz="1300" dirty="0">
+                      <a:endParaRPr lang="en-US" sz="1500" dirty="0">
                         <a:latin typeface="Inter" charset="0"/>
                         <a:ea typeface="Inter" charset="0"/>
                         <a:cs typeface="Inter" charset="0"/>
@@ -6433,7 +6398,7 @@
                         <a:buNone/>
                       </a:pPr>
                       <a:r>
-                        <a:rPr lang="en-US" sz="1300" dirty="0">
+                        <a:rPr lang="en-US" sz="1500" dirty="0">
                           <a:solidFill>
                             <a:srgbClr val="111827"/>
                           </a:solidFill>
@@ -6443,7 +6408,7 @@
                         </a:rPr>
                         <a:t>Embedding candidate</a:t>
                       </a:r>
-                      <a:endParaRPr lang="en-US" sz="1300" dirty="0">
+                      <a:endParaRPr lang="en-US" sz="1500" dirty="0">
                         <a:latin typeface="Inter" charset="0"/>
                         <a:ea typeface="Inter" charset="0"/>
                         <a:cs typeface="Inter" charset="0"/>
@@ -6501,7 +6466,7 @@
                         <a:buNone/>
                       </a:pPr>
                       <a:r>
-                        <a:rPr lang="en-US" sz="1300" dirty="0">
+                        <a:rPr lang="en-US" sz="1500" dirty="0">
                           <a:solidFill>
                             <a:srgbClr val="111827"/>
                           </a:solidFill>
@@ -6509,9 +6474,9 @@
                           <a:ea typeface="Inter" pitchFamily="34" charset="-122"/>
                           <a:cs typeface="Inter" pitchFamily="34" charset="-120"/>
                         </a:rPr>
-                        <a:t>Must improve retrieval for this corpus, not just benchmark well</a:t>
+                        <a:t>Must improve retrieval for this corpus</a:t>
                       </a:r>
-                      <a:endParaRPr lang="en-US" sz="1300" dirty="0">
+                      <a:endParaRPr lang="en-US" sz="1500" dirty="0">
                         <a:latin typeface="Inter" charset="0"/>
                         <a:ea typeface="Inter" charset="0"/>
                         <a:cs typeface="Inter" charset="0"/>
@@ -6571,7 +6536,7 @@
                         <a:buNone/>
                       </a:pPr>
                       <a:r>
-                        <a:rPr lang="en-US" sz="1300" dirty="0">
+                        <a:rPr lang="en-US" sz="1500" dirty="0">
                           <a:solidFill>
                             <a:srgbClr val="111827"/>
                           </a:solidFill>
@@ -6581,7 +6546,7 @@
                         </a:rPr>
                         <a:t>Regional deployment</a:t>
                       </a:r>
-                      <a:endParaRPr lang="en-US" sz="1300" dirty="0">
+                      <a:endParaRPr lang="en-US" sz="1500" dirty="0">
                         <a:latin typeface="Inter" charset="0"/>
                         <a:ea typeface="Inter" charset="0"/>
                         <a:cs typeface="Inter" charset="0"/>
@@ -6639,7 +6604,7 @@
                         <a:buNone/>
                       </a:pPr>
                       <a:r>
-                        <a:rPr lang="en-US" sz="1300" dirty="0">
+                        <a:rPr lang="en-US" sz="1500" dirty="0">
                           <a:solidFill>
                             <a:srgbClr val="111827"/>
                           </a:solidFill>
@@ -6649,7 +6614,7 @@
                         </a:rPr>
                         <a:t>Keeps data and latency aligned, but may constrain availability</a:t>
                       </a:r>
-                      <a:endParaRPr lang="en-US" sz="1300" dirty="0">
+                      <a:endParaRPr lang="en-US" sz="1500" dirty="0">
                         <a:latin typeface="Inter" charset="0"/>
                         <a:ea typeface="Inter" charset="0"/>
                         <a:cs typeface="Inter" charset="0"/>
@@ -6709,7 +6674,7 @@
                         <a:buNone/>
                       </a:pPr>
                       <a:r>
-                        <a:rPr lang="en-US" sz="1300" dirty="0">
+                        <a:rPr lang="en-US" sz="1500" dirty="0">
                           <a:solidFill>
                             <a:srgbClr val="111827"/>
                           </a:solidFill>
@@ -6719,7 +6684,7 @@
                         </a:rPr>
                         <a:t>Pay-as-you-go</a:t>
                       </a:r>
-                      <a:endParaRPr lang="en-US" sz="1300" dirty="0">
+                      <a:endParaRPr lang="en-US" sz="1500" dirty="0">
                         <a:latin typeface="Inter" charset="0"/>
                         <a:ea typeface="Inter" charset="0"/>
                         <a:cs typeface="Inter" charset="0"/>
@@ -6777,7 +6742,7 @@
                         <a:buNone/>
                       </a:pPr>
                       <a:r>
-                        <a:rPr lang="en-US" sz="1300" dirty="0">
+                        <a:rPr lang="en-US" sz="1500" dirty="0">
                           <a:solidFill>
                             <a:srgbClr val="111827"/>
                           </a:solidFill>
@@ -6787,7 +6752,7 @@
                         </a:rPr>
                         <a:t>Flexible for pilots, with variable throughput</a:t>
                       </a:r>
-                      <a:endParaRPr lang="en-US" sz="1300" dirty="0">
+                      <a:endParaRPr lang="en-US" sz="1500" dirty="0">
                         <a:latin typeface="Inter" charset="0"/>
                         <a:ea typeface="Inter" charset="0"/>
                         <a:cs typeface="Inter" charset="0"/>
@@ -6847,7 +6812,7 @@
                         <a:buNone/>
                       </a:pPr>
                       <a:r>
-                        <a:rPr lang="en-US" sz="1300" dirty="0">
+                        <a:rPr lang="en-US" sz="1500" dirty="0">
                           <a:solidFill>
                             <a:srgbClr val="111827"/>
                           </a:solidFill>
@@ -6857,7 +6822,7 @@
                         </a:rPr>
                         <a:t>Provisioned throughput</a:t>
                       </a:r>
-                      <a:endParaRPr lang="en-US" sz="1300" dirty="0">
+                      <a:endParaRPr lang="en-US" sz="1500" dirty="0">
                         <a:latin typeface="Inter" charset="0"/>
                         <a:ea typeface="Inter" charset="0"/>
                         <a:cs typeface="Inter" charset="0"/>
@@ -6915,7 +6880,7 @@
                         <a:buNone/>
                       </a:pPr>
                       <a:r>
-                        <a:rPr lang="en-US" sz="1300" dirty="0">
+                        <a:rPr lang="en-US" sz="1500" dirty="0">
                           <a:solidFill>
                             <a:srgbClr val="111827"/>
                           </a:solidFill>
@@ -6925,7 +6890,7 @@
                         </a:rPr>
                         <a:t>Predictable capacity, with stronger planning commitment</a:t>
                       </a:r>
-                      <a:endParaRPr lang="en-US" sz="1300" dirty="0">
+                      <a:endParaRPr lang="en-US" sz="1500" dirty="0">
                         <a:latin typeface="Inter" charset="0"/>
                         <a:ea typeface="Inter" charset="0"/>
                         <a:cs typeface="Inter" charset="0"/>
@@ -7040,7 +7005,7 @@
       </p:sp>
       <p:pic>
         <p:nvPicPr>
-          <p:cNvPr id="3" name="Image 0" descr="/home/marco/fy27-hackathons/frontier-ai-starter-kit-rvas/docs/assets/img/logo-mark-slide.png">    </p:cNvPr>
+          <p:cNvPr id="3" name="Image 0" descr="/Users/marco/Desktop/repo/frontier-agentic-cobuild-rvas/docs/assets/img/logo-mark-slide.png">    </p:cNvPr>
           <p:cNvPicPr>
             <a:picLocks noChangeAspect="1"/>
           </p:cNvPicPr>
@@ -7169,7 +7134,7 @@
               <a:buNone/>
             </a:pPr>
             <a:r>
-              <a:rPr lang="en-US" sz="2500" b="1" dirty="0">
+              <a:rPr lang="en-US" sz="2900" b="1" dirty="0">
                 <a:solidFill>
                   <a:srgbClr val="032254"/>
                 </a:solidFill>
@@ -7177,9 +7142,9 @@
                 <a:ea typeface="Outfit" pitchFamily="34" charset="-122"/>
                 <a:cs typeface="Outfit" pitchFamily="34" charset="-120"/>
               </a:rPr>
-              <a:t>Module 4 — what must be true: model decision supports grounded answers</a:t>
-            </a:r>
-            <a:endParaRPr lang="en-US" sz="2500" dirty="0"/>
+              <a:t>Module 4. Prove the models support grounded answers</a:t>
+            </a:r>
+            <a:endParaRPr lang="en-US" sz="2900" dirty="0"/>
           </a:p>
         </p:txBody>
       </p:sp>
@@ -7361,7 +7326,7 @@
                 <a:ea typeface="Inter" pitchFamily="34" charset="-122"/>
                 <a:cs typeface="Inter" pitchFamily="34" charset="-120"/>
               </a:rPr>
-              <a:t>Decision: the selected model and embedding path meet the pilot's quality and operating constraints.</a:t>
+              <a:t>Confirm the selected models meet the pilot's quality and operating constraints.</a:t>
             </a:r>
             <a:endParaRPr lang="en-US" sz="1700" dirty="0"/>
           </a:p>
@@ -7428,7 +7393,7 @@
       </p:sp>
       <p:pic>
         <p:nvPicPr>
-          <p:cNvPr id="3" name="Image 0" descr="/home/marco/fy27-hackathons/frontier-ai-starter-kit-rvas/docs/assets/img/logo-mark-slide.png">    </p:cNvPr>
+          <p:cNvPr id="3" name="Image 0" descr="/Users/marco/Desktop/repo/frontier-agentic-cobuild-rvas/docs/assets/img/logo-mark-slide.png">    </p:cNvPr>
           <p:cNvPicPr>
             <a:picLocks noChangeAspect="1"/>
           </p:cNvPicPr>
@@ -7565,7 +7530,7 @@
                 <a:ea typeface="Outfit" pitchFamily="34" charset="-122"/>
                 <a:cs typeface="Outfit" pitchFamily="34" charset="-120"/>
               </a:rPr>
-              <a:t>Module 5 context: build retrieval before adding an agent</a:t>
+              <a:t>Module 5. Build retrieval before adding an agent</a:t>
             </a:r>
             <a:endParaRPr lang="en-US" sz="2900" dirty="0"/>
           </a:p>
@@ -7677,7 +7642,7 @@
                 <a:ea typeface="Inter" pitchFamily="34" charset="-122"/>
                 <a:cs typeface="Inter" pitchFamily="34" charset="-120"/>
               </a:rPr>
-              <a:t>Can the system find the right source passage for the user’s question?</a:t>
+              <a:t>Can the system find the right source passage for the user's question?</a:t>
             </a:r>
             <a:endParaRPr lang="en-US" sz="1700" dirty="0"/>
           </a:p>
@@ -7766,7 +7731,7 @@
                 <a:ea typeface="Inter" pitchFamily="34" charset="-122"/>
                 <a:cs typeface="Inter" pitchFamily="34" charset="-120"/>
               </a:rPr>
-              <a:t>Design stance: retrieval, citations, abstention, and recency come before agent behavior.</a:t>
+              <a:t>Test retrieval, citations, abstention, and recency before adding an agent.</a:t>
             </a:r>
             <a:endParaRPr lang="en-US" sz="1700" dirty="0"/>
           </a:p>
@@ -7833,7 +7798,7 @@
       </p:sp>
       <p:pic>
         <p:nvPicPr>
-          <p:cNvPr id="3" name="Image 0" descr="/home/marco/fy27-hackathons/frontier-ai-starter-kit-rvas/docs/assets/img/logo-mark-slide.png">    </p:cNvPr>
+          <p:cNvPr id="3" name="Image 0" descr="/Users/marco/Desktop/repo/frontier-agentic-cobuild-rvas/docs/assets/img/logo-mark-slide.png">    </p:cNvPr>
           <p:cNvPicPr>
             <a:picLocks noChangeAspect="1"/>
           </p:cNvPicPr>
@@ -7962,7 +7927,7 @@
               <a:buNone/>
             </a:pPr>
             <a:r>
-              <a:rPr lang="en-US" sz="2500" b="1" dirty="0">
+              <a:rPr lang="en-US" sz="2900" b="1" dirty="0">
                 <a:solidFill>
                   <a:srgbClr val="032254"/>
                 </a:solidFill>
@@ -7970,9 +7935,9 @@
                 <a:ea typeface="Outfit" pitchFamily="34" charset="-122"/>
                 <a:cs typeface="Outfit" pitchFamily="34" charset="-120"/>
               </a:rPr>
-              <a:t>Module 5 choices: answer synthesis or extractive retrieval?</a:t>
-            </a:r>
-            <a:endParaRPr lang="en-US" sz="2500" dirty="0"/>
+              <a:t>Module 5. Choose answer synthesis or extractive retrieval</a:t>
+            </a:r>
+            <a:endParaRPr lang="en-US" sz="2900" dirty="0"/>
           </a:p>
         </p:txBody>
       </p:sp>
@@ -8933,7 +8898,7 @@
       </p:sp>
       <p:pic>
         <p:nvPicPr>
-          <p:cNvPr id="3" name="Image 0" descr="/home/marco/fy27-hackathons/frontier-ai-starter-kit-rvas/docs/assets/img/logo-mark-slide.png">    </p:cNvPr>
+          <p:cNvPr id="3" name="Image 0" descr="/Users/marco/Desktop/repo/frontier-agentic-cobuild-rvas/docs/assets/img/logo-mark-slide.png">    </p:cNvPr>
           <p:cNvPicPr>
             <a:picLocks noChangeAspect="1"/>
           </p:cNvPicPr>
@@ -9062,7 +9027,7 @@
               <a:buNone/>
             </a:pPr>
             <a:r>
-              <a:rPr lang="en-US" sz="2500" b="1" dirty="0">
+              <a:rPr lang="en-US" sz="2900" b="1" dirty="0">
                 <a:solidFill>
                   <a:srgbClr val="032254"/>
                 </a:solidFill>
@@ -9070,9 +9035,9 @@
                 <a:ea typeface="Outfit" pitchFamily="34" charset="-122"/>
                 <a:cs typeface="Outfit" pitchFamily="34" charset="-120"/>
               </a:rPr>
-              <a:t>Module 5 — what must be true: retrieval is trustworthy enough to use</a:t>
-            </a:r>
-            <a:endParaRPr lang="en-US" sz="2500" dirty="0"/>
+              <a:t>Module 5. Prove retrieval meets the acceptance criteria</a:t>
+            </a:r>
+            <a:endParaRPr lang="en-US" sz="2900" dirty="0"/>
           </a:p>
         </p:txBody>
       </p:sp>
@@ -9254,7 +9219,7 @@
                 <a:ea typeface="Inter" pitchFamily="34" charset="-122"/>
                 <a:cs typeface="Inter" pitchFamily="34" charset="-120"/>
               </a:rPr>
-              <a:t>Decision: add an agent only when orchestration solves a customer need that retrieval alone cannot.</a:t>
+              <a:t>Add an agent only when orchestration solves a need that retrieval alone cannot meet.</a:t>
             </a:r>
             <a:endParaRPr lang="en-US" sz="1700" dirty="0"/>
           </a:p>
@@ -9321,7 +9286,7 @@
       </p:sp>
       <p:pic>
         <p:nvPicPr>
-          <p:cNvPr id="3" name="Image 0" descr="/home/marco/fy27-hackathons/frontier-ai-starter-kit-rvas/docs/assets/img/logo-mark-slide.png">    </p:cNvPr>
+          <p:cNvPr id="3" name="Image 0" descr="/Users/marco/Desktop/repo/frontier-agentic-cobuild-rvas/docs/assets/img/logo-mark-slide.png">    </p:cNvPr>
           <p:cNvPicPr>
             <a:picLocks noChangeAspect="1"/>
           </p:cNvPicPr>
@@ -9458,7 +9423,7 @@
                 <a:ea typeface="Outfit" pitchFamily="34" charset="-122"/>
                 <a:cs typeface="Outfit" pitchFamily="34" charset="-120"/>
               </a:rPr>
-              <a:t>Module 6 context: add agent and live-data routing only when justified</a:t>
+              <a:t>Module 6. Add agent and live-data routing only when justified</a:t>
             </a:r>
             <a:endParaRPr lang="en-US" sz="2500" dirty="0"/>
           </a:p>
@@ -9659,7 +9624,7 @@
                 <a:ea typeface="Inter" pitchFamily="34" charset="-122"/>
                 <a:cs typeface="Inter" pitchFamily="34" charset="-120"/>
               </a:rPr>
-              <a:t>Boundary: live data complements the source of truth. It must not silently replace it.</a:t>
+              <a:t>Use live data for current state and approved knowledge for policy. Keep their sources explicit.</a:t>
             </a:r>
             <a:endParaRPr lang="en-US" sz="1700" dirty="0"/>
           </a:p>
@@ -9726,7 +9691,7 @@
       </p:sp>
       <p:pic>
         <p:nvPicPr>
-          <p:cNvPr id="3" name="Image 0" descr="/home/marco/fy27-hackathons/frontier-ai-starter-kit-rvas/docs/assets/img/logo-mark-slide.png">    </p:cNvPr>
+          <p:cNvPr id="3" name="Image 0" descr="/Users/marco/Desktop/repo/frontier-agentic-cobuild-rvas/docs/assets/img/logo-mark-slide.png">    </p:cNvPr>
           <p:cNvPicPr>
             <a:picLocks noChangeAspect="1"/>
           </p:cNvPicPr>
@@ -9863,7 +9828,7 @@
                 <a:ea typeface="Outfit" pitchFamily="34" charset="-122"/>
                 <a:cs typeface="Outfit" pitchFamily="34" charset="-120"/>
               </a:rPr>
-              <a:t>Module 6 choices: route sources with clear rules</a:t>
+              <a:t>Module 6. Route sources with clear rules</a:t>
             </a:r>
             <a:endParaRPr lang="en-US" sz="2900" dirty="0"/>
           </a:p>
@@ -11005,7 +10970,7 @@
       </p:grpSpPr>
       <p:pic>
         <p:nvPicPr>
-          <p:cNvPr id="2" name="Image 0" descr="/home/marco/fy27-hackathons/frontier-ai-starter-kit-rvas/docs/assets/img/logo-mark-white-slide.png">    </p:cNvPr>
+          <p:cNvPr id="2" name="Image 0" descr="/Users/marco/Desktop/repo/frontier-agentic-cobuild-rvas/docs/assets/img/logo-mark-white-slide.png">    </p:cNvPr>
           <p:cNvPicPr>
             <a:picLocks noChangeAspect="1"/>
           </p:cNvPicPr>
@@ -11183,7 +11148,7 @@
                 <a:ea typeface="Inter" pitchFamily="34" charset="-122"/>
                 <a:cs typeface="Inter" pitchFamily="34" charset="-120"/>
               </a:rPr>
-              <a:t>Choose the smallest useful scenario that can be grounded, evaluated, and operated safely. This is not an enterprise platform design session.</a:t>
+              <a:t>Choose the smallest useful scenario the team can ground in approved content and operate safely. Keep enterprise platform design outside this session's scope.</a:t>
             </a:r>
             <a:endParaRPr lang="en-US" sz="1600" dirty="0"/>
           </a:p>
@@ -11878,7 +11843,7 @@
       </p:sp>
       <p:pic>
         <p:nvPicPr>
-          <p:cNvPr id="3" name="Image 0" descr="/home/marco/fy27-hackathons/frontier-ai-starter-kit-rvas/docs/assets/img/logo-mark-slide.png">    </p:cNvPr>
+          <p:cNvPr id="3" name="Image 0" descr="/Users/marco/Desktop/repo/frontier-agentic-cobuild-rvas/docs/assets/img/logo-mark-slide.png">    </p:cNvPr>
           <p:cNvPicPr>
             <a:picLocks noChangeAspect="1"/>
           </p:cNvPicPr>
@@ -12007,7 +11972,7 @@
               <a:buNone/>
             </a:pPr>
             <a:r>
-              <a:rPr lang="en-US" sz="2500" b="1" dirty="0">
+              <a:rPr lang="en-US" sz="2900" b="1" dirty="0">
                 <a:solidFill>
                   <a:srgbClr val="032254"/>
                 </a:solidFill>
@@ -12015,9 +11980,9 @@
                 <a:ea typeface="Outfit" pitchFamily="34" charset="-122"/>
                 <a:cs typeface="Outfit" pitchFamily="34" charset="-120"/>
               </a:rPr>
-              <a:t>Module 6 — what must be true: routing is explainable and controlled</a:t>
-            </a:r>
-            <a:endParaRPr lang="en-US" sz="2500" dirty="0"/>
+              <a:t>Module 6. Prove routing chooses the expected source</a:t>
+            </a:r>
+            <a:endParaRPr lang="en-US" sz="2900" dirty="0"/>
           </a:p>
         </p:txBody>
       </p:sp>
@@ -12199,7 +12164,7 @@
                 <a:ea typeface="Inter" pitchFamily="34" charset="-122"/>
                 <a:cs typeface="Inter" pitchFamily="34" charset="-120"/>
               </a:rPr>
-              <a:t>Decision: evaluate the agent as a controlled router.</a:t>
+              <a:t>Test that the agent chooses the expected source for each request type.</a:t>
             </a:r>
             <a:endParaRPr lang="en-US" sz="1700" dirty="0"/>
           </a:p>
@@ -12266,7 +12231,7 @@
       </p:sp>
       <p:pic>
         <p:nvPicPr>
-          <p:cNvPr id="3" name="Image 0" descr="/home/marco/fy27-hackathons/frontier-ai-starter-kit-rvas/docs/assets/img/logo-mark-slide.png">    </p:cNvPr>
+          <p:cNvPr id="3" name="Image 0" descr="/Users/marco/Desktop/repo/frontier-agentic-cobuild-rvas/docs/assets/img/logo-mark-slide.png">    </p:cNvPr>
           <p:cNvPicPr>
             <a:picLocks noChangeAspect="1"/>
           </p:cNvPicPr>
@@ -12403,7 +12368,7 @@
                 <a:ea typeface="Outfit" pitchFamily="34" charset="-122"/>
                 <a:cs typeface="Outfit" pitchFamily="34" charset="-120"/>
               </a:rPr>
-              <a:t>Module 7 context: evaluate and trace</a:t>
+              <a:t>Module 7. Evaluate and trace</a:t>
             </a:r>
             <a:endParaRPr lang="en-US" sz="3400" dirty="0"/>
           </a:p>
@@ -12604,7 +12569,7 @@
                 <a:ea typeface="Inter" pitchFamily="34" charset="-122"/>
                 <a:cs typeface="Inter" pitchFamily="34" charset="-120"/>
               </a:rPr>
-              <a:t>Operating mindset: an evaluation you only read is a report. One that blocks release is a control.</a:t>
+              <a:t>Configure evaluation failures to block release.</a:t>
             </a:r>
             <a:endParaRPr lang="en-US" sz="1700" dirty="0"/>
           </a:p>
@@ -12671,7 +12636,7 @@
       </p:sp>
       <p:pic>
         <p:nvPicPr>
-          <p:cNvPr id="3" name="Image 0" descr="/home/marco/fy27-hackathons/frontier-ai-starter-kit-rvas/docs/assets/img/logo-mark-slide.png">    </p:cNvPr>
+          <p:cNvPr id="3" name="Image 0" descr="/Users/marco/Desktop/repo/frontier-agentic-cobuild-rvas/docs/assets/img/logo-mark-slide.png">    </p:cNvPr>
           <p:cNvPicPr>
             <a:picLocks noChangeAspect="1"/>
           </p:cNvPicPr>
@@ -12800,7 +12765,7 @@
               <a:buNone/>
             </a:pPr>
             <a:r>
-              <a:rPr lang="en-US" sz="2900" b="1" dirty="0">
+              <a:rPr lang="en-US" sz="3400" b="1" dirty="0">
                 <a:solidFill>
                   <a:srgbClr val="032254"/>
                 </a:solidFill>
@@ -12808,9 +12773,9 @@
                 <a:ea typeface="Outfit" pitchFamily="34" charset="-122"/>
                 <a:cs typeface="Outfit" pitchFamily="34" charset="-120"/>
               </a:rPr>
-              <a:t>Module 7 choices: how much evidence is enough</a:t>
-            </a:r>
-            <a:endParaRPr lang="en-US" sz="2900" dirty="0"/>
+              <a:t>Module 7. Choose the release evidence</a:t>
+            </a:r>
+            <a:endParaRPr lang="en-US" sz="3400" dirty="0"/>
           </a:p>
         </p:txBody>
       </p:sp>
@@ -13912,7 +13877,7 @@
       </p:sp>
       <p:pic>
         <p:nvPicPr>
-          <p:cNvPr id="3" name="Image 0" descr="/home/marco/fy27-hackathons/frontier-ai-starter-kit-rvas/docs/assets/img/logo-mark-slide.png">    </p:cNvPr>
+          <p:cNvPr id="3" name="Image 0" descr="/Users/marco/Desktop/repo/frontier-agentic-cobuild-rvas/docs/assets/img/logo-mark-slide.png">    </p:cNvPr>
           <p:cNvPicPr>
             <a:picLocks noChangeAspect="1"/>
           </p:cNvPicPr>
@@ -14049,7 +14014,7 @@
                 <a:ea typeface="Outfit" pitchFamily="34" charset="-122"/>
                 <a:cs typeface="Outfit" pitchFamily="34" charset="-120"/>
               </a:rPr>
-              <a:t>Module 7 — what must be true: the assistant is good enough</a:t>
+              <a:t>Module 7. Prove the assistant meets the release criteria</a:t>
             </a:r>
             <a:endParaRPr lang="en-US" sz="2900" dirty="0"/>
           </a:p>
@@ -14215,7 +14180,7 @@
                 <a:ea typeface="Inter" pitchFamily="34" charset="-122"/>
                 <a:cs typeface="Inter" pitchFamily="34" charset="-120"/>
               </a:rPr>
-              <a:t>Decision: the evidence supports release to real people, or identifies what must change first.</a:t>
+              <a:t>Use these results to approve release or assign the changes needed first.</a:t>
             </a:r>
             <a:endParaRPr lang="en-US" sz="1700" dirty="0"/>
           </a:p>
@@ -14282,7 +14247,7 @@
       </p:sp>
       <p:pic>
         <p:nvPicPr>
-          <p:cNvPr id="3" name="Image 0" descr="/home/marco/fy27-hackathons/frontier-ai-starter-kit-rvas/docs/assets/img/logo-mark-slide.png">    </p:cNvPr>
+          <p:cNvPr id="3" name="Image 0" descr="/Users/marco/Desktop/repo/frontier-agentic-cobuild-rvas/docs/assets/img/logo-mark-slide.png">    </p:cNvPr>
           <p:cNvPicPr>
             <a:picLocks noChangeAspect="1"/>
           </p:cNvPicPr>
@@ -14411,7 +14376,7 @@
               <a:buNone/>
             </a:pPr>
             <a:r>
-              <a:rPr lang="en-US" sz="2900" b="1" dirty="0">
+              <a:rPr lang="en-US" sz="3400" b="1" dirty="0">
                 <a:solidFill>
                   <a:srgbClr val="032254"/>
                 </a:solidFill>
@@ -14419,9 +14384,9 @@
                 <a:ea typeface="Outfit" pitchFamily="34" charset="-122"/>
                 <a:cs typeface="Outfit" pitchFamily="34" charset="-120"/>
               </a:rPr>
-              <a:t>Module 8 context: deploy and surface it to users</a:t>
-            </a:r>
-            <a:endParaRPr lang="en-US" sz="2900" dirty="0"/>
+              <a:t>Module 8. Deploy to the user channel</a:t>
+            </a:r>
+            <a:endParaRPr lang="en-US" sz="3400" dirty="0"/>
           </a:p>
         </p:txBody>
       </p:sp>
@@ -14620,7 +14585,7 @@
                 <a:ea typeface="Inter" pitchFamily="34" charset="-122"/>
                 <a:cs typeface="Inter" pitchFamily="34" charset="-120"/>
               </a:rPr>
-              <a:t>Delivery check: connect the answer path you tested, with or without an agent. Prove it through the intended user's authenticated channel.</a:t>
+              <a:t>Connect the answer path you tested, with or without an agent. Prove it through the intended user's authenticated channel.</a:t>
             </a:r>
             <a:endParaRPr lang="en-US" sz="1700" dirty="0"/>
           </a:p>
@@ -14687,7 +14652,7 @@
       </p:sp>
       <p:pic>
         <p:nvPicPr>
-          <p:cNvPr id="3" name="Image 0" descr="/home/marco/fy27-hackathons/frontier-ai-starter-kit-rvas/docs/assets/img/logo-mark-slide.png">    </p:cNvPr>
+          <p:cNvPr id="3" name="Image 0" descr="/Users/marco/Desktop/repo/frontier-agentic-cobuild-rvas/docs/assets/img/logo-mark-slide.png">    </p:cNvPr>
           <p:cNvPicPr>
             <a:picLocks noChangeAspect="1"/>
           </p:cNvPicPr>
@@ -14816,7 +14781,7 @@
               <a:buNone/>
             </a:pPr>
             <a:r>
-              <a:rPr lang="en-US" sz="2900" b="1" dirty="0">
+              <a:rPr lang="en-US" sz="3400" b="1" dirty="0">
                 <a:solidFill>
                   <a:srgbClr val="032254"/>
                 </a:solidFill>
@@ -14824,9 +14789,9 @@
                 <a:ea typeface="Outfit" pitchFamily="34" charset="-122"/>
                 <a:cs typeface="Outfit" pitchFamily="34" charset="-120"/>
               </a:rPr>
-              <a:t>Module 8 choices: pick the doorway, keep the rules</a:t>
-            </a:r>
-            <a:endParaRPr lang="en-US" sz="2900" dirty="0"/>
+              <a:t>Module 8. Choose the user channel</a:t>
+            </a:r>
+            <a:endParaRPr lang="en-US" sz="3400" dirty="0"/>
           </a:p>
         </p:txBody>
       </p:sp>
@@ -14916,7 +14881,7 @@
                           <a:ea typeface="Inter" pitchFamily="34" charset="-122"/>
                           <a:cs typeface="Inter" pitchFamily="34" charset="-120"/>
                         </a:rPr>
-                        <a:t>Surface</a:t>
+                        <a:t>User channel or runtime</a:t>
                       </a:r>
                       <a:endParaRPr lang="en-US" sz="1300" dirty="0">
                         <a:latin typeface="Inter" charset="0"/>
@@ -15052,7 +15017,7 @@
                           <a:ea typeface="Inter" pitchFamily="34" charset="-122"/>
                           <a:cs typeface="Inter" pitchFamily="34" charset="-120"/>
                         </a:rPr>
-                        <a:t>When it wins</a:t>
+                        <a:t>When it fits</a:t>
                       </a:r>
                       <a:endParaRPr lang="en-US" sz="1300" dirty="0">
                         <a:latin typeface="Inter" charset="0"/>
@@ -16199,7 +16164,7 @@
       </p:sp>
       <p:pic>
         <p:nvPicPr>
-          <p:cNvPr id="3" name="Image 0" descr="/home/marco/fy27-hackathons/frontier-ai-starter-kit-rvas/docs/assets/img/logo-mark-slide.png">    </p:cNvPr>
+          <p:cNvPr id="3" name="Image 0" descr="/Users/marco/Desktop/repo/frontier-agentic-cobuild-rvas/docs/assets/img/logo-mark-slide.png">    </p:cNvPr>
           <p:cNvPicPr>
             <a:picLocks noChangeAspect="1"/>
           </p:cNvPicPr>
@@ -16336,7 +16301,7 @@
                 <a:ea typeface="Outfit" pitchFamily="34" charset="-122"/>
                 <a:cs typeface="Outfit" pitchFamily="34" charset="-120"/>
               </a:rPr>
-              <a:t>Module 8 — what must be true: safe to hand to real users</a:t>
+              <a:t>Module 8. Prove the application is ready for users</a:t>
             </a:r>
             <a:endParaRPr lang="en-US" sz="2900" dirty="0"/>
           </a:p>
@@ -16413,7 +16378,7 @@
                 <a:ea typeface="Inter" pitchFamily="34" charset="-122"/>
                 <a:cs typeface="Inter" pitchFamily="34" charset="-120"/>
               </a:rPr>
-              <a:t>The surface, why it was chosen, and who can use it</a:t>
+              <a:t>The user channel, why it was chosen, and who can use it</a:t>
             </a:r>
             <a:endParaRPr lang="en-US" sz="1700" dirty="0"/>
           </a:p>
@@ -16449,7 +16414,7 @@
                 <a:ea typeface="Inter" pitchFamily="34" charset="-122"/>
                 <a:cs typeface="Inter" pitchFamily="34" charset="-120"/>
               </a:rPr>
-              <a:t>The permission probe re-run against the surface itself, not just the agent</a:t>
+              <a:t>The permission probe re-run through the user channel as well as the agent</a:t>
             </a:r>
             <a:endParaRPr lang="en-US" sz="1700" dirty="0"/>
           </a:p>
@@ -16520,7 +16485,7 @@
                 <a:ea typeface="Inter" pitchFamily="34" charset="-122"/>
                 <a:cs typeface="Inter" pitchFamily="34" charset="-120"/>
               </a:rPr>
-              <a:t>Decision: ship, ship with conditions, or stop. A written stop decision has value.</a:t>
+              <a:t>Record whether to ship, ship with conditions, or stop.</a:t>
             </a:r>
             <a:endParaRPr lang="en-US" sz="1700" dirty="0"/>
           </a:p>
@@ -16560,7 +16525,7 @@
       </p:grpSpPr>
       <p:pic>
         <p:nvPicPr>
-          <p:cNvPr id="2" name="Image 0" descr="/home/marco/fy27-hackathons/frontier-ai-starter-kit-rvas/docs/assets/img/logo-mark-white-slide.png">    </p:cNvPr>
+          <p:cNvPr id="2" name="Image 0" descr="/Users/marco/Desktop/repo/frontier-agentic-cobuild-rvas/docs/assets/img/logo-mark-white-slide.png">    </p:cNvPr>
           <p:cNvPicPr>
             <a:picLocks noChangeAspect="1"/>
           </p:cNvPicPr>
@@ -16689,7 +16654,7 @@
               <a:buNone/>
             </a:pPr>
             <a:r>
-              <a:rPr lang="en-US" sz="2900" b="1" dirty="0">
+              <a:rPr lang="en-US" sz="3400" b="1" dirty="0">
                 <a:solidFill>
                   <a:srgbClr val="FFFFFF"/>
                 </a:solidFill>
@@ -16697,9 +16662,9 @@
                 <a:ea typeface="Outfit" pitchFamily="34" charset="-122"/>
                 <a:cs typeface="Outfit" pitchFamily="34" charset="-120"/>
               </a:rPr>
-              <a:t>Close the discussion: turn decisions into the pilot plan</a:t>
-            </a:r>
-            <a:endParaRPr lang="en-US" sz="2900" dirty="0"/>
+              <a:t>Turn the decisions into a pilot plan</a:t>
+            </a:r>
+            <a:endParaRPr lang="en-US" sz="3400" dirty="0"/>
           </a:p>
         </p:txBody>
       </p:sp>
@@ -16934,7 +16899,7 @@
                 <a:ea typeface="Inter" pitchFamily="34" charset="-122"/>
                 <a:cs typeface="Inter" pitchFamily="34" charset="-120"/>
               </a:rPr>
-              <a:t>Exit outcome: a pilot decision record the delivery team can implement through the modules.</a:t>
+              <a:t>Use this decision record to plan implementation through the modules.</a:t>
             </a:r>
             <a:endParaRPr lang="en-US" sz="1700" dirty="0"/>
           </a:p>
@@ -17001,7 +16966,7 @@
       </p:sp>
       <p:pic>
         <p:nvPicPr>
-          <p:cNvPr id="3" name="Image 0" descr="/home/marco/fy27-hackathons/frontier-ai-starter-kit-rvas/docs/assets/img/logo-mark-slide.png">    </p:cNvPr>
+          <p:cNvPr id="3" name="Image 0" descr="/Users/marco/Desktop/repo/frontier-agentic-cobuild-rvas/docs/assets/img/logo-mark-slide.png">    </p:cNvPr>
           <p:cNvPicPr>
             <a:picLocks noChangeAspect="1"/>
           </p:cNvPicPr>
@@ -17138,7 +17103,7 @@
                 <a:ea typeface="Outfit" pitchFamily="34" charset="-122"/>
                 <a:cs typeface="Outfit" pitchFamily="34" charset="-120"/>
               </a:rPr>
-              <a:t>Module 1 context: provision the grounding foundation</a:t>
+              <a:t>Module 1. Confirm the grounding foundation</a:t>
             </a:r>
             <a:endParaRPr lang="en-US" sz="2900" dirty="0"/>
           </a:p>
@@ -17339,7 +17304,7 @@
                 <a:ea typeface="Inter" pitchFamily="34" charset="-122"/>
                 <a:cs typeface="Inter" pitchFamily="34" charset="-120"/>
               </a:rPr>
-              <a:t>Principle: protect the source of truth before optimizing developer convenience.</a:t>
+              <a:t>Confirm source ownership and access before choosing deployment defaults.</a:t>
             </a:r>
             <a:endParaRPr lang="en-US" sz="1700" dirty="0"/>
           </a:p>
@@ -17406,7 +17371,7 @@
       </p:sp>
       <p:pic>
         <p:nvPicPr>
-          <p:cNvPr id="3" name="Image 0" descr="/home/marco/fy27-hackathons/frontier-ai-starter-kit-rvas/docs/assets/img/logo-mark-slide.png">    </p:cNvPr>
+          <p:cNvPr id="3" name="Image 0" descr="/Users/marco/Desktop/repo/frontier-agentic-cobuild-rvas/docs/assets/img/logo-mark-slide.png">    </p:cNvPr>
           <p:cNvPicPr>
             <a:picLocks noChangeAspect="1"/>
           </p:cNvPicPr>
@@ -17535,7 +17500,7 @@
               <a:buNone/>
             </a:pPr>
             <a:r>
-              <a:rPr lang="en-US" sz="2500" b="1" dirty="0">
+              <a:rPr lang="en-US" sz="3400" b="1" dirty="0">
                 <a:solidFill>
                   <a:srgbClr val="032254"/>
                 </a:solidFill>
@@ -17543,9 +17508,9 @@
                 <a:ea typeface="Outfit" pitchFamily="34" charset="-122"/>
                 <a:cs typeface="Outfit" pitchFamily="34" charset="-120"/>
               </a:rPr>
-              <a:t>Module 1 choices: shared foundation or existing landing zone?</a:t>
-            </a:r>
-            <a:endParaRPr lang="en-US" sz="2500" dirty="0"/>
+              <a:t>Module 1. Choose the foundation</a:t>
+            </a:r>
+            <a:endParaRPr lang="en-US" sz="3400" dirty="0"/>
           </a:p>
         </p:txBody>
       </p:sp>
@@ -18712,7 +18677,7 @@
       </p:sp>
       <p:pic>
         <p:nvPicPr>
-          <p:cNvPr id="3" name="Image 0" descr="/home/marco/fy27-hackathons/frontier-ai-starter-kit-rvas/docs/assets/img/logo-mark-slide.png">    </p:cNvPr>
+          <p:cNvPr id="3" name="Image 0" descr="/Users/marco/Desktop/repo/frontier-agentic-cobuild-rvas/docs/assets/img/logo-mark-slide.png">    </p:cNvPr>
           <p:cNvPicPr>
             <a:picLocks noChangeAspect="1"/>
           </p:cNvPicPr>
@@ -18841,7 +18806,7 @@
               <a:buNone/>
             </a:pPr>
             <a:r>
-              <a:rPr lang="en-US" sz="2500" b="1" dirty="0">
+              <a:rPr lang="en-US" sz="2900" b="1" dirty="0">
                 <a:solidFill>
                   <a:srgbClr val="032254"/>
                 </a:solidFill>
@@ -18849,9 +18814,9 @@
                 <a:ea typeface="Outfit" pitchFamily="34" charset="-122"/>
                 <a:cs typeface="Outfit" pitchFamily="34" charset="-120"/>
               </a:rPr>
-              <a:t>Module 1 — what must be true: foundation is ready for content</a:t>
-            </a:r>
-            <a:endParaRPr lang="en-US" sz="2500" dirty="0"/>
+              <a:t>Module 1. Prove the foundation is ready for content</a:t>
+            </a:r>
+            <a:endParaRPr lang="en-US" sz="2900" dirty="0"/>
           </a:p>
         </p:txBody>
       </p:sp>
@@ -19033,7 +18998,7 @@
                 <a:ea typeface="Inter" pitchFamily="34" charset="-122"/>
                 <a:cs typeface="Inter" pitchFamily="34" charset="-120"/>
               </a:rPr>
-              <a:t>Decision: it is safe to connect approved pilot content.</a:t>
+              <a:t>Connect approved pilot content only after these checks pass.</a:t>
             </a:r>
             <a:endParaRPr lang="en-US" sz="1700" dirty="0"/>
           </a:p>
@@ -19100,7 +19065,7 @@
       </p:sp>
       <p:pic>
         <p:nvPicPr>
-          <p:cNvPr id="3" name="Image 0" descr="/home/marco/fy27-hackathons/frontier-ai-starter-kit-rvas/docs/assets/img/logo-mark-slide.png">    </p:cNvPr>
+          <p:cNvPr id="3" name="Image 0" descr="/Users/marco/Desktop/repo/frontier-agentic-cobuild-rvas/docs/assets/img/logo-mark-slide.png">    </p:cNvPr>
           <p:cNvPicPr>
             <a:picLocks noChangeAspect="1"/>
           </p:cNvPicPr>
@@ -19229,7 +19194,7 @@
               <a:buNone/>
             </a:pPr>
             <a:r>
-              <a:rPr lang="en-US" sz="2500" b="1" dirty="0">
+              <a:rPr lang="en-US" sz="2900" b="1" dirty="0">
                 <a:solidFill>
                   <a:srgbClr val="032254"/>
                 </a:solidFill>
@@ -19237,9 +19202,9 @@
                 <a:ea typeface="Outfit" pitchFamily="34" charset="-122"/>
                 <a:cs typeface="Outfit" pitchFamily="34" charset="-120"/>
               </a:rPr>
-              <a:t>Module 2 context: select the source and permission architecture</a:t>
-            </a:r>
-            <a:endParaRPr lang="en-US" sz="2500" dirty="0"/>
+              <a:t>Module 2. Select the source and permission architecture</a:t>
+            </a:r>
+            <a:endParaRPr lang="en-US" sz="2900" dirty="0"/>
           </a:p>
         </p:txBody>
       </p:sp>
@@ -19278,7 +19243,7 @@
                 <a:ea typeface="Inter" pitchFamily="34" charset="-122"/>
                 <a:cs typeface="Inter" pitchFamily="34" charset="-120"/>
               </a:rPr>
-              <a:t>Start grounding with source ownership, not a search box.</a:t>
+              <a:t>Identify the source owner before configuring retrieval.</a:t>
             </a:r>
             <a:endParaRPr lang="en-US" sz="1700" dirty="0"/>
           </a:p>
@@ -19456,7 +19421,7 @@
                 <a:ea typeface="Inter" pitchFamily="34" charset="-122"/>
                 <a:cs typeface="Inter" pitchFamily="34" charset="-120"/>
               </a:rPr>
-              <a:t>Non-negotiable: every pilot source needs an owner and an access decision.</a:t>
+              <a:t>Every pilot source needs an owner and an access decision.</a:t>
             </a:r>
             <a:endParaRPr lang="en-US" sz="1700" dirty="0"/>
           </a:p>
@@ -19523,7 +19488,7 @@
       </p:sp>
       <p:pic>
         <p:nvPicPr>
-          <p:cNvPr id="3" name="Image 0" descr="/home/marco/fy27-hackathons/frontier-ai-starter-kit-rvas/docs/assets/img/logo-mark-slide.png">    </p:cNvPr>
+          <p:cNvPr id="3" name="Image 0" descr="/Users/marco/Desktop/repo/frontier-agentic-cobuild-rvas/docs/assets/img/logo-mark-slide.png">    </p:cNvPr>
           <p:cNvPicPr>
             <a:picLocks noChangeAspect="1"/>
           </p:cNvPicPr>
@@ -19660,7 +19625,7 @@
                 <a:ea typeface="Outfit" pitchFamily="34" charset="-122"/>
                 <a:cs typeface="Outfit" pitchFamily="34" charset="-120"/>
               </a:rPr>
-              <a:t>Module 2 choices: match IQ and source patterns to the work</a:t>
+              <a:t>Module 2. Match IQ and source patterns to the work</a:t>
             </a:r>
             <a:endParaRPr lang="en-US" sz="2900" dirty="0"/>
           </a:p>
@@ -21200,7 +21165,7 @@
       </p:sp>
       <p:pic>
         <p:nvPicPr>
-          <p:cNvPr id="3" name="Image 0" descr="/home/marco/fy27-hackathons/frontier-ai-starter-kit-rvas/docs/assets/img/logo-mark-slide.png">    </p:cNvPr>
+          <p:cNvPr id="3" name="Image 0" descr="/Users/marco/Desktop/repo/frontier-agentic-cobuild-rvas/docs/assets/img/logo-mark-slide.png">    </p:cNvPr>
           <p:cNvPicPr>
             <a:picLocks noChangeAspect="1"/>
           </p:cNvPicPr>
@@ -21329,7 +21294,7 @@
               <a:buNone/>
             </a:pPr>
             <a:r>
-              <a:rPr lang="en-US" sz="2500" b="1" dirty="0">
+              <a:rPr lang="en-US" sz="2900" b="1" dirty="0">
                 <a:solidFill>
                   <a:srgbClr val="032254"/>
                 </a:solidFill>
@@ -21337,9 +21302,9 @@
                 <a:ea typeface="Outfit" pitchFamily="34" charset="-122"/>
                 <a:cs typeface="Outfit" pitchFamily="34" charset="-120"/>
               </a:rPr>
-              <a:t>Module 2 — what must be true: signed source and access decision</a:t>
-            </a:r>
-            <a:endParaRPr lang="en-US" sz="2500" dirty="0"/>
+              <a:t>Module 2. Approve the source and access decision</a:t>
+            </a:r>
+            <a:endParaRPr lang="en-US" sz="2900" dirty="0"/>
           </a:p>
         </p:txBody>
       </p:sp>
@@ -21521,7 +21486,7 @@
                 <a:ea typeface="Inter" pitchFamily="34" charset="-122"/>
                 <a:cs typeface="Inter" pitchFamily="34" charset="-120"/>
               </a:rPr>
-              <a:t>Decision: the pilot has a defensible source architecture before indexing starts.</a:t>
+              <a:t>Approve the source and access decisions before indexing starts.</a:t>
             </a:r>
             <a:endParaRPr lang="en-US" sz="1700" dirty="0"/>
           </a:p>
@@ -21588,7 +21553,7 @@
       </p:sp>
       <p:pic>
         <p:nvPicPr>
-          <p:cNvPr id="3" name="Image 0" descr="/home/marco/fy27-hackathons/frontier-ai-starter-kit-rvas/docs/assets/img/logo-mark-slide.png">    </p:cNvPr>
+          <p:cNvPr id="3" name="Image 0" descr="/Users/marco/Desktop/repo/frontier-agentic-cobuild-rvas/docs/assets/img/logo-mark-slide.png">    </p:cNvPr>
           <p:cNvPicPr>
             <a:picLocks noChangeAspect="1"/>
           </p:cNvPicPr>
@@ -21725,7 +21690,7 @@
                 <a:ea typeface="Outfit" pitchFamily="34" charset="-122"/>
                 <a:cs typeface="Outfit" pitchFamily="34" charset="-120"/>
               </a:rPr>
-              <a:t>Module 3 context: ingest and index approved content</a:t>
+              <a:t>Module 3. Ingest and index approved content</a:t>
             </a:r>
             <a:endParaRPr lang="en-US" sz="2900" dirty="0"/>
           </a:p>
@@ -21766,7 +21731,7 @@
                 <a:ea typeface="Inter" pitchFamily="34" charset="-122"/>
                 <a:cs typeface="Inter" pitchFamily="34" charset="-120"/>
               </a:rPr>
-              <a:t>Ingestion does more than move files. It keeps the evidence behind an answer.</a:t>
+              <a:t>Ingestion must preserve source metadata so reviewers can check an answer.</a:t>
             </a:r>
             <a:endParaRPr lang="en-US" sz="1700" dirty="0"/>
           </a:p>
@@ -21926,7 +21891,7 @@
                 <a:ea typeface="Inter" pitchFamily="34" charset="-122"/>
                 <a:cs typeface="Inter" pitchFamily="34" charset="-120"/>
               </a:rPr>
-              <a:t>Goal: retrieve the right passage and provenance for the user.</a:t>
+              <a:t>Check that retrieval returns the relevant passage with its source metadata.</a:t>
             </a:r>
             <a:endParaRPr lang="en-US" sz="1700" dirty="0"/>
           </a:p>
